--- a/docs/slides/RevenueOS.pptx
+++ b/docs/slides/RevenueOS.pptx
@@ -9074,7 +9074,7 @@
                 </a:solidFill>
                 <a:latin typeface="Helvetica Neue"/>
               </a:rPr>
-              <a:t>48 open issues across six milestones. Nothing is closed unless code exists behind it.</a:t>
+              <a:t>46 open issues, 18 closed. Nothing is closed unless code exists behind it.</a:t>
             </a:r>
           </a:p>
         </p:txBody>
